--- a/metro/metro-s06-about-me.pptx
+++ b/metro/metro-s06-about-me.pptx
@@ -3690,9 +3690,9 @@
                 <a:solidFill>
                   <a:srgbClr val="14161A"/>
                 </a:solidFill>
-                <a:latin typeface="Space Grotesk"/>
-                <a:ea typeface="Space Grotesk"/>
-                <a:cs typeface="Space Grotesk"/>
+                <a:latin typeface="HK Grotesk"/>
+                <a:ea typeface="HK Grotesk"/>
+                <a:cs typeface="HK Grotesk"/>
               </a:rPr>
               <a:t>NO</a:t>
             </a:r>
@@ -3799,9 +3799,9 @@
                 <a:solidFill>
                   <a:srgbClr val="14161A"/>
                 </a:solidFill>
-                <a:latin typeface="Space Grotesk"/>
-                <a:ea typeface="Space Grotesk"/>
-                <a:cs typeface="Space Grotesk"/>
+                <a:latin typeface="HK Grotesk"/>
+                <a:ea typeface="HK Grotesk"/>
+                <a:cs typeface="HK Grotesk"/>
               </a:rPr>
               <a:t>Julian Reyes</a:t>
             </a:r>
@@ -3873,9 +3873,9 @@
                 <a:solidFill>
                   <a:srgbClr val="2D5BE3"/>
                 </a:solidFill>
-                <a:latin typeface="Space Grotesk"/>
-                <a:ea typeface="Space Grotesk"/>
-                <a:cs typeface="Space Grotesk"/>
+                <a:latin typeface="HK Grotesk"/>
+                <a:ea typeface="HK Grotesk"/>
+                <a:cs typeface="HK Grotesk"/>
               </a:rPr>
               <a:t>01</a:t>
             </a:r>
@@ -3908,9 +3908,9 @@
                 <a:solidFill>
                   <a:srgbClr val="14161A"/>
                 </a:solidFill>
-                <a:latin typeface="Space Grotesk"/>
-                <a:ea typeface="Space Grotesk"/>
-                <a:cs typeface="Space Grotesk"/>
+                <a:latin typeface="HK Grotesk"/>
+                <a:ea typeface="HK Grotesk"/>
+                <a:cs typeface="HK Grotesk"/>
               </a:rPr>
               <a:t>Eight years</a:t>
             </a:r>
@@ -3947,9 +3947,9 @@
                 <a:solidFill>
                   <a:srgbClr val="8A8F99"/>
                 </a:solidFill>
-                <a:latin typeface="Space Grotesk"/>
-                <a:ea typeface="Space Grotesk"/>
-                <a:cs typeface="Space Grotesk"/>
+                <a:latin typeface="HK Grotesk"/>
+                <a:ea typeface="HK Grotesk"/>
+                <a:cs typeface="HK Grotesk"/>
               </a:rPr>
               <a:t>selling condos across downtown.</a:t>
             </a:r>
@@ -3986,9 +3986,9 @@
                 <a:solidFill>
                   <a:srgbClr val="2D5BE3"/>
                 </a:solidFill>
-                <a:latin typeface="Space Grotesk"/>
-                <a:ea typeface="Space Grotesk"/>
-                <a:cs typeface="Space Grotesk"/>
+                <a:latin typeface="HK Grotesk"/>
+                <a:ea typeface="HK Grotesk"/>
+                <a:cs typeface="HK Grotesk"/>
               </a:rPr>
               <a:t>02</a:t>
             </a:r>
@@ -4021,9 +4021,9 @@
                 <a:solidFill>
                   <a:srgbClr val="14161A"/>
                 </a:solidFill>
-                <a:latin typeface="Space Grotesk"/>
-                <a:ea typeface="Space Grotesk"/>
-                <a:cs typeface="Space Grotesk"/>
+                <a:latin typeface="HK Grotesk"/>
+                <a:ea typeface="HK Grotesk"/>
+                <a:cs typeface="HK Grotesk"/>
               </a:rPr>
               <a:t>Top 2%</a:t>
             </a:r>
@@ -4060,9 +4060,9 @@
                 <a:solidFill>
                   <a:srgbClr val="8A8F99"/>
                 </a:solidFill>
-                <a:latin typeface="Space Grotesk"/>
-                <a:ea typeface="Space Grotesk"/>
-                <a:cs typeface="Space Grotesk"/>
+                <a:latin typeface="HK Grotesk"/>
+                <a:ea typeface="HK Grotesk"/>
+                <a:cs typeface="HK Grotesk"/>
               </a:rPr>
               <a:t>of agents in the city by volume.</a:t>
             </a:r>
@@ -4099,9 +4099,9 @@
                 <a:solidFill>
                   <a:srgbClr val="2D5BE3"/>
                 </a:solidFill>
-                <a:latin typeface="Space Grotesk"/>
-                <a:ea typeface="Space Grotesk"/>
-                <a:cs typeface="Space Grotesk"/>
+                <a:latin typeface="HK Grotesk"/>
+                <a:ea typeface="HK Grotesk"/>
+                <a:cs typeface="HK Grotesk"/>
               </a:rPr>
               <a:t>03</a:t>
             </a:r>
@@ -4134,9 +4134,9 @@
                 <a:solidFill>
                   <a:srgbClr val="14161A"/>
                 </a:solidFill>
-                <a:latin typeface="Space Grotesk"/>
-                <a:ea typeface="Space Grotesk"/>
-                <a:cs typeface="Space Grotesk"/>
+                <a:latin typeface="HK Grotesk"/>
+                <a:ea typeface="HK Grotesk"/>
+                <a:cs typeface="HK Grotesk"/>
               </a:rPr>
               <a:t>Lifelong local</a:t>
             </a:r>
@@ -4173,9 +4173,9 @@
                 <a:solidFill>
                   <a:srgbClr val="8A8F99"/>
                 </a:solidFill>
-                <a:latin typeface="Space Grotesk"/>
-                <a:ea typeface="Space Grotesk"/>
-                <a:cs typeface="Space Grotesk"/>
+                <a:latin typeface="HK Grotesk"/>
+                <a:ea typeface="HK Grotesk"/>
+                <a:cs typeface="HK Grotesk"/>
               </a:rPr>
               <a:t>who actually knows the buildings.</a:t>
             </a:r>
@@ -4208,9 +4208,9 @@
                 <a:solidFill>
                   <a:srgbClr val="14161A"/>
                 </a:solidFill>
-                <a:latin typeface="Space Grotesk"/>
-                <a:ea typeface="Space Grotesk"/>
-                <a:cs typeface="Space Grotesk"/>
+                <a:latin typeface="HK Grotesk"/>
+                <a:ea typeface="HK Grotesk"/>
+                <a:cs typeface="HK Grotesk"/>
               </a:rPr>
               <a:t>Follow for more</a:t>
             </a:r>
@@ -4243,9 +4243,9 @@
                 <a:solidFill>
                   <a:srgbClr val="2D5BE3"/>
                 </a:solidFill>
-                <a:latin typeface="Space Grotesk"/>
-                <a:ea typeface="Space Grotesk"/>
-                <a:cs typeface="Space Grotesk"/>
+                <a:latin typeface="HK Grotesk"/>
+                <a:ea typeface="HK Grotesk"/>
+                <a:cs typeface="HK Grotesk"/>
               </a:rPr>
               <a:t>↗</a:t>
             </a:r>

--- a/metro/metro-s06-about-me.pptx
+++ b/metro/metro-s06-about-me.pptx
@@ -3316,7 +3316,7 @@
         </p:nvSpPr>
         <p:spPr>
           <a:xfrm>
-            <a:off x="762000" y="8680847"/>
+            <a:off x="762000" y="9936361"/>
             <a:ext cx="8763000" cy="9525"/>
           </a:xfrm>
           <a:prstGeom prst="rect">
@@ -3360,7 +3360,7 @@
         </p:nvSpPr>
         <p:spPr>
           <a:xfrm>
-            <a:off x="762000" y="9409509"/>
+            <a:off x="762000" y="11035903"/>
             <a:ext cx="8763000" cy="9525"/>
           </a:xfrm>
           <a:prstGeom prst="rect">
@@ -3404,7 +3404,7 @@
         </p:nvSpPr>
         <p:spPr>
           <a:xfrm>
-            <a:off x="762000" y="10138172"/>
+            <a:off x="762000" y="12135445"/>
             <a:ext cx="8763000" cy="9525"/>
           </a:xfrm>
           <a:prstGeom prst="rect">
@@ -3448,7 +3448,7 @@
         </p:nvSpPr>
         <p:spPr>
           <a:xfrm>
-            <a:off x="762000" y="15735300"/>
+            <a:off x="762000" y="15525750"/>
             <a:ext cx="8763000" cy="9525"/>
           </a:xfrm>
           <a:prstGeom prst="rect">
@@ -3536,8 +3536,8 @@
         </p:nvSpPr>
         <p:spPr>
           <a:xfrm>
-            <a:off x="762000" y="15735300"/>
-            <a:ext cx="9525" cy="647700"/>
+            <a:off x="762000" y="15525750"/>
+            <a:ext cx="9525" cy="857250"/>
           </a:xfrm>
           <a:prstGeom prst="rect">
             <a:avLst/>
@@ -3580,8 +3580,8 @@
         </p:nvSpPr>
         <p:spPr>
           <a:xfrm>
-            <a:off x="9515475" y="15735300"/>
-            <a:ext cx="9525" cy="647700"/>
+            <a:off x="9515475" y="15525750"/>
+            <a:ext cx="9525" cy="857250"/>
           </a:xfrm>
           <a:prstGeom prst="rect">
             <a:avLst/>
@@ -3624,7 +3624,7 @@
         </p:nvSpPr>
         <p:spPr>
           <a:xfrm>
-            <a:off x="1024416" y="16012004"/>
+            <a:off x="1081566" y="15907229"/>
             <a:ext cx="94293" cy="94292"/>
           </a:xfrm>
           <a:prstGeom prst="rect">
@@ -3690,9 +3690,9 @@
                 <a:solidFill>
                   <a:srgbClr val="14161A"/>
                 </a:solidFill>
-                <a:latin typeface="HK Grotesk"/>
-                <a:ea typeface="HK Grotesk"/>
-                <a:cs typeface="HK Grotesk"/>
+                <a:latin typeface="Space Grotesk"/>
+                <a:ea typeface="Space Grotesk"/>
+                <a:cs typeface="Space Grotesk"/>
               </a:rPr>
               <a:t>NO</a:t>
             </a:r>
@@ -3707,8 +3707,8 @@
         </p:nvSpPr>
         <p:spPr>
           <a:xfrm>
-            <a:off x="8119765" y="938212"/>
-            <a:ext cx="2629376" cy="104775"/>
+            <a:off x="7276654" y="900112"/>
+            <a:ext cx="3978354" cy="180975"/>
           </a:xfrm>
           <a:prstGeom prst="rect">
             <a:avLst/>
@@ -3721,7 +3721,7 @@
           <a:p>
             <a:pPr algn="l"/>
             <a:r>
-              <a:rPr sz="750" i="0" b="0" spc="240">
+              <a:rPr sz="1200" i="0" b="0" spc="384">
                 <a:solidFill>
                   <a:srgbClr val="8A8F99"/>
                 </a:solidFill>
@@ -3742,8 +3742,8 @@
         </p:nvSpPr>
         <p:spPr>
           <a:xfrm>
-            <a:off x="-2057400" y="6477000"/>
-            <a:ext cx="14401800" cy="133350"/>
+            <a:off x="-2057400" y="6934200"/>
+            <a:ext cx="14401800" cy="228600"/>
           </a:xfrm>
           <a:prstGeom prst="rect">
             <a:avLst/>
@@ -3756,7 +3756,7 @@
           <a:p>
             <a:pPr algn="ctr"/>
             <a:r>
-              <a:rPr sz="900" i="0" b="0" spc="324">
+              <a:rPr sz="1575" i="0" b="0" spc="472">
                 <a:solidFill>
                   <a:srgbClr val="2D5BE3"/>
                 </a:solidFill>
@@ -3777,8 +3777,8 @@
         </p:nvSpPr>
         <p:spPr>
           <a:xfrm>
-            <a:off x="-2057400" y="6743700"/>
-            <a:ext cx="14401800" cy="560784"/>
+            <a:off x="-2057400" y="7315200"/>
+            <a:ext cx="14401800" cy="683419"/>
           </a:xfrm>
           <a:prstGeom prst="rect">
             <a:avLst/>
@@ -3795,13 +3795,13 @@
               </a:lnSpc>
             </a:pPr>
             <a:r>
-              <a:rPr sz="4800" i="0" b="1" spc="-192">
+              <a:rPr sz="5850" i="0" b="1" spc="-234">
                 <a:solidFill>
                   <a:srgbClr val="14161A"/>
                 </a:solidFill>
-                <a:latin typeface="HK Grotesk"/>
-                <a:ea typeface="HK Grotesk"/>
-                <a:cs typeface="HK Grotesk"/>
+                <a:latin typeface="Space Grotesk"/>
+                <a:ea typeface="Space Grotesk"/>
+                <a:cs typeface="Space Grotesk"/>
               </a:rPr>
               <a:t>Julian Reyes</a:t>
             </a:r>
@@ -3816,8 +3816,8 @@
         </p:nvSpPr>
         <p:spPr>
           <a:xfrm>
-            <a:off x="-2057400" y="7418784"/>
-            <a:ext cx="14401800" cy="104775"/>
+            <a:off x="-2057400" y="8131969"/>
+            <a:ext cx="14401800" cy="180975"/>
           </a:xfrm>
           <a:prstGeom prst="rect">
             <a:avLst/>
@@ -3830,7 +3830,7 @@
           <a:p>
             <a:pPr algn="ctr"/>
             <a:r>
-              <a:rPr sz="750" i="0" b="0" spc="240">
+              <a:rPr sz="1200" i="0" b="0" spc="384">
                 <a:solidFill>
                   <a:srgbClr val="8A8F99"/>
                 </a:solidFill>
@@ -3851,8 +3851,8 @@
         </p:nvSpPr>
         <p:spPr>
           <a:xfrm>
-            <a:off x="762000" y="8114109"/>
-            <a:ext cx="754142" cy="230386"/>
+            <a:off x="762000" y="9055894"/>
+            <a:ext cx="1025366" cy="398115"/>
           </a:xfrm>
           <a:prstGeom prst="rect">
             <a:avLst/>
@@ -3869,13 +3869,13 @@
               </a:lnSpc>
             </a:pPr>
             <a:r>
-              <a:rPr sz="1650" i="0" b="1">
+              <a:rPr sz="2850" i="0" b="1">
                 <a:solidFill>
                   <a:srgbClr val="2D5BE3"/>
                 </a:solidFill>
-                <a:latin typeface="HK Grotesk"/>
-                <a:ea typeface="HK Grotesk"/>
-                <a:cs typeface="HK Grotesk"/>
+                <a:latin typeface="Space Grotesk"/>
+                <a:ea typeface="Space Grotesk"/>
+                <a:cs typeface="Space Grotesk"/>
               </a:rPr>
               <a:t>01</a:t>
             </a:r>
@@ -3890,8 +3890,8 @@
         </p:nvSpPr>
         <p:spPr>
           <a:xfrm>
-            <a:off x="1166664" y="8114109"/>
-            <a:ext cx="3277552" cy="200025"/>
+            <a:off x="1336179" y="9055894"/>
+            <a:ext cx="5059918" cy="323850"/>
           </a:xfrm>
           <a:prstGeom prst="rect">
             <a:avLst/>
@@ -3904,13 +3904,13 @@
           <a:p>
             <a:pPr algn="l"/>
             <a:r>
-              <a:rPr sz="1350" i="0" b="1">
+              <a:rPr sz="2250" i="0" b="1">
                 <a:solidFill>
                   <a:srgbClr val="14161A"/>
                 </a:solidFill>
-                <a:latin typeface="HK Grotesk"/>
-                <a:ea typeface="HK Grotesk"/>
-                <a:cs typeface="HK Grotesk"/>
+                <a:latin typeface="Space Grotesk"/>
+                <a:ea typeface="Space Grotesk"/>
+                <a:cs typeface="Space Grotesk"/>
               </a:rPr>
               <a:t>Eight years</a:t>
             </a:r>
@@ -3925,8 +3925,8 @@
         </p:nvSpPr>
         <p:spPr>
           <a:xfrm>
-            <a:off x="1166664" y="8342709"/>
-            <a:ext cx="3277552" cy="185738"/>
+            <a:off x="1336179" y="9436894"/>
+            <a:ext cx="5059918" cy="289917"/>
           </a:xfrm>
           <a:prstGeom prst="rect">
             <a:avLst/>
@@ -3939,17 +3939,17 @@
           <a:p>
             <a:pPr algn="l">
               <a:lnSpc>
-                <a:spcPct val="150000"/>
+                <a:spcPct val="145000"/>
               </a:lnSpc>
             </a:pPr>
             <a:r>
-              <a:rPr sz="975" i="0" b="0">
+              <a:rPr sz="1575" i="0" b="0">
                 <a:solidFill>
                   <a:srgbClr val="8A8F99"/>
                 </a:solidFill>
-                <a:latin typeface="HK Grotesk"/>
-                <a:ea typeface="HK Grotesk"/>
-                <a:cs typeface="HK Grotesk"/>
+                <a:latin typeface="Space Grotesk"/>
+                <a:ea typeface="Space Grotesk"/>
+                <a:cs typeface="Space Grotesk"/>
               </a:rPr>
               <a:t>selling condos across downtown.</a:t>
             </a:r>
@@ -3964,8 +3964,8 @@
         </p:nvSpPr>
         <p:spPr>
           <a:xfrm>
-            <a:off x="762000" y="8842772"/>
-            <a:ext cx="754142" cy="230386"/>
+            <a:off x="762000" y="10155436"/>
+            <a:ext cx="1025366" cy="398115"/>
           </a:xfrm>
           <a:prstGeom prst="rect">
             <a:avLst/>
@@ -3982,13 +3982,13 @@
               </a:lnSpc>
             </a:pPr>
             <a:r>
-              <a:rPr sz="1650" i="0" b="1">
+              <a:rPr sz="2850" i="0" b="1">
                 <a:solidFill>
                   <a:srgbClr val="2D5BE3"/>
                 </a:solidFill>
-                <a:latin typeface="HK Grotesk"/>
-                <a:ea typeface="HK Grotesk"/>
-                <a:cs typeface="HK Grotesk"/>
+                <a:latin typeface="Space Grotesk"/>
+                <a:ea typeface="Space Grotesk"/>
+                <a:cs typeface="Space Grotesk"/>
               </a:rPr>
               <a:t>02</a:t>
             </a:r>
@@ -4003,8 +4003,8 @@
         </p:nvSpPr>
         <p:spPr>
           <a:xfrm>
-            <a:off x="1166664" y="8842772"/>
-            <a:ext cx="3101102" cy="200025"/>
+            <a:off x="1336179" y="10155436"/>
+            <a:ext cx="4775121" cy="323850"/>
           </a:xfrm>
           <a:prstGeom prst="rect">
             <a:avLst/>
@@ -4017,13 +4017,13 @@
           <a:p>
             <a:pPr algn="l"/>
             <a:r>
-              <a:rPr sz="1350" i="0" b="1">
+              <a:rPr sz="2250" i="0" b="1">
                 <a:solidFill>
                   <a:srgbClr val="14161A"/>
                 </a:solidFill>
-                <a:latin typeface="HK Grotesk"/>
-                <a:ea typeface="HK Grotesk"/>
-                <a:cs typeface="HK Grotesk"/>
+                <a:latin typeface="Space Grotesk"/>
+                <a:ea typeface="Space Grotesk"/>
+                <a:cs typeface="Space Grotesk"/>
               </a:rPr>
               <a:t>Top 2%</a:t>
             </a:r>
@@ -4038,8 +4038,8 @@
         </p:nvSpPr>
         <p:spPr>
           <a:xfrm>
-            <a:off x="1166664" y="9071372"/>
-            <a:ext cx="3101102" cy="185738"/>
+            <a:off x="1336179" y="10536436"/>
+            <a:ext cx="4775121" cy="289917"/>
           </a:xfrm>
           <a:prstGeom prst="rect">
             <a:avLst/>
@@ -4052,17 +4052,17 @@
           <a:p>
             <a:pPr algn="l">
               <a:lnSpc>
-                <a:spcPct val="150000"/>
+                <a:spcPct val="145000"/>
               </a:lnSpc>
             </a:pPr>
             <a:r>
-              <a:rPr sz="975" i="0" b="0">
+              <a:rPr sz="1575" i="0" b="0">
                 <a:solidFill>
                   <a:srgbClr val="8A8F99"/>
                 </a:solidFill>
-                <a:latin typeface="HK Grotesk"/>
-                <a:ea typeface="HK Grotesk"/>
-                <a:cs typeface="HK Grotesk"/>
+                <a:latin typeface="Space Grotesk"/>
+                <a:ea typeface="Space Grotesk"/>
+                <a:cs typeface="Space Grotesk"/>
               </a:rPr>
               <a:t>of agents in the city by volume.</a:t>
             </a:r>
@@ -4077,8 +4077,8 @@
         </p:nvSpPr>
         <p:spPr>
           <a:xfrm>
-            <a:off x="762000" y="9571434"/>
-            <a:ext cx="754142" cy="230386"/>
+            <a:off x="762000" y="11254978"/>
+            <a:ext cx="1025366" cy="398115"/>
           </a:xfrm>
           <a:prstGeom prst="rect">
             <a:avLst/>
@@ -4095,13 +4095,13 @@
               </a:lnSpc>
             </a:pPr>
             <a:r>
-              <a:rPr sz="1650" i="0" b="1">
+              <a:rPr sz="2850" i="0" b="1">
                 <a:solidFill>
                   <a:srgbClr val="2D5BE3"/>
                 </a:solidFill>
-                <a:latin typeface="HK Grotesk"/>
-                <a:ea typeface="HK Grotesk"/>
-                <a:cs typeface="HK Grotesk"/>
+                <a:latin typeface="Space Grotesk"/>
+                <a:ea typeface="Space Grotesk"/>
+                <a:cs typeface="Space Grotesk"/>
               </a:rPr>
               <a:t>03</a:t>
             </a:r>
@@ -4116,8 +4116,8 @@
         </p:nvSpPr>
         <p:spPr>
           <a:xfrm>
-            <a:off x="1166664" y="9571434"/>
-            <a:ext cx="3310652" cy="200025"/>
+            <a:off x="1336179" y="11254978"/>
+            <a:ext cx="5113258" cy="323850"/>
           </a:xfrm>
           <a:prstGeom prst="rect">
             <a:avLst/>
@@ -4130,13 +4130,13 @@
           <a:p>
             <a:pPr algn="l"/>
             <a:r>
-              <a:rPr sz="1350" i="0" b="1">
+              <a:rPr sz="2250" i="0" b="1">
                 <a:solidFill>
                   <a:srgbClr val="14161A"/>
                 </a:solidFill>
-                <a:latin typeface="HK Grotesk"/>
-                <a:ea typeface="HK Grotesk"/>
-                <a:cs typeface="HK Grotesk"/>
+                <a:latin typeface="Space Grotesk"/>
+                <a:ea typeface="Space Grotesk"/>
+                <a:cs typeface="Space Grotesk"/>
               </a:rPr>
               <a:t>Lifelong local</a:t>
             </a:r>
@@ -4151,8 +4151,8 @@
         </p:nvSpPr>
         <p:spPr>
           <a:xfrm>
-            <a:off x="1166664" y="9800034"/>
-            <a:ext cx="3310652" cy="185738"/>
+            <a:off x="1336179" y="11635978"/>
+            <a:ext cx="5113258" cy="289917"/>
           </a:xfrm>
           <a:prstGeom prst="rect">
             <a:avLst/>
@@ -4165,17 +4165,17 @@
           <a:p>
             <a:pPr algn="l">
               <a:lnSpc>
-                <a:spcPct val="150000"/>
+                <a:spcPct val="145000"/>
               </a:lnSpc>
             </a:pPr>
             <a:r>
-              <a:rPr sz="975" i="0" b="0">
+              <a:rPr sz="1575" i="0" b="0">
                 <a:solidFill>
                   <a:srgbClr val="8A8F99"/>
                 </a:solidFill>
-                <a:latin typeface="HK Grotesk"/>
-                <a:ea typeface="HK Grotesk"/>
-                <a:cs typeface="HK Grotesk"/>
+                <a:latin typeface="Space Grotesk"/>
+                <a:ea typeface="Space Grotesk"/>
+                <a:cs typeface="Space Grotesk"/>
               </a:rPr>
               <a:t>who actually knows the buildings.</a:t>
             </a:r>
@@ -4190,8 +4190,8 @@
         </p:nvSpPr>
         <p:spPr>
           <a:xfrm>
-            <a:off x="1238250" y="15978188"/>
-            <a:ext cx="2164080" cy="161925"/>
+            <a:off x="1314450" y="15825788"/>
+            <a:ext cx="3115151" cy="257175"/>
           </a:xfrm>
           <a:prstGeom prst="rect">
             <a:avLst/>
@@ -4204,13 +4204,13 @@
           <a:p>
             <a:pPr algn="l"/>
             <a:r>
-              <a:rPr sz="1125" i="0" b="1" spc="22">
+              <a:rPr sz="1725" i="0" b="1" spc="34">
                 <a:solidFill>
                   <a:srgbClr val="14161A"/>
                 </a:solidFill>
-                <a:latin typeface="HK Grotesk"/>
-                <a:ea typeface="HK Grotesk"/>
-                <a:cs typeface="HK Grotesk"/>
+                <a:latin typeface="Space Grotesk"/>
+                <a:ea typeface="Space Grotesk"/>
+                <a:cs typeface="Space Grotesk"/>
               </a:rPr>
               <a:t>Follow for more</a:t>
             </a:r>
@@ -4225,8 +4225,8 @@
         </p:nvSpPr>
         <p:spPr>
           <a:xfrm>
-            <a:off x="9105900" y="15954375"/>
-            <a:ext cx="609600" cy="209550"/>
+            <a:off x="9001125" y="15821025"/>
+            <a:ext cx="685800" cy="266700"/>
           </a:xfrm>
           <a:prstGeom prst="rect">
             <a:avLst/>
@@ -4239,13 +4239,13 @@
           <a:p>
             <a:pPr algn="l"/>
             <a:r>
-              <a:rPr sz="1350" i="0" b="0">
+              <a:rPr sz="1800" i="0" b="0">
                 <a:solidFill>
                   <a:srgbClr val="2D5BE3"/>
                 </a:solidFill>
-                <a:latin typeface="HK Grotesk"/>
-                <a:ea typeface="HK Grotesk"/>
-                <a:cs typeface="HK Grotesk"/>
+                <a:latin typeface="Space Grotesk"/>
+                <a:ea typeface="Space Grotesk"/>
+                <a:cs typeface="Space Grotesk"/>
               </a:rPr>
               <a:t>↗</a:t>
             </a:r>
@@ -4260,8 +4260,8 @@
         </p:nvSpPr>
         <p:spPr>
           <a:xfrm>
-            <a:off x="2557031" y="17297400"/>
-            <a:ext cx="5172789" cy="123825"/>
+            <a:off x="1468041" y="17249775"/>
+            <a:ext cx="7350919" cy="180975"/>
           </a:xfrm>
           <a:prstGeom prst="rect">
             <a:avLst/>
@@ -4274,7 +4274,7 @@
           <a:p>
             <a:pPr algn="ctr"/>
             <a:r>
-              <a:rPr sz="825" i="0" b="0" spc="264">
+              <a:rPr sz="1200" i="0" b="0" spc="384">
                 <a:solidFill>
                   <a:srgbClr val="8A8F99"/>
                 </a:solidFill>
@@ -4303,8 +4303,8 @@
         </p:blipFill>
         <p:spPr>
           <a:xfrm>
-            <a:off x="3429000" y="2667000"/>
-            <a:ext cx="3429000" cy="3429000"/>
+            <a:off x="3048000" y="2286000"/>
+            <a:ext cx="4191000" cy="4191000"/>
           </a:xfrm>
           <a:prstGeom prst="rect">
             <a:avLst/>

--- a/metro/metro-s06-about-me.pptx
+++ b/metro/metro-s06-about-me.pptx
@@ -3316,7 +3316,7 @@
         </p:nvSpPr>
         <p:spPr>
           <a:xfrm>
-            <a:off x="762000" y="9936361"/>
+            <a:off x="762000" y="10056019"/>
             <a:ext cx="8763000" cy="9525"/>
           </a:xfrm>
           <a:prstGeom prst="rect">
@@ -3360,7 +3360,7 @@
         </p:nvSpPr>
         <p:spPr>
           <a:xfrm>
-            <a:off x="762000" y="11035903"/>
+            <a:off x="762000" y="11237119"/>
             <a:ext cx="8763000" cy="9525"/>
           </a:xfrm>
           <a:prstGeom prst="rect">
@@ -3404,7 +3404,7 @@
         </p:nvSpPr>
         <p:spPr>
           <a:xfrm>
-            <a:off x="762000" y="12135445"/>
+            <a:off x="762000" y="12418219"/>
             <a:ext cx="8763000" cy="9525"/>
           </a:xfrm>
           <a:prstGeom prst="rect">
@@ -3448,7 +3448,7 @@
         </p:nvSpPr>
         <p:spPr>
           <a:xfrm>
-            <a:off x="762000" y="15525750"/>
+            <a:off x="762000" y="15478125"/>
             <a:ext cx="8763000" cy="9525"/>
           </a:xfrm>
           <a:prstGeom prst="rect">
@@ -3536,8 +3536,8 @@
         </p:nvSpPr>
         <p:spPr>
           <a:xfrm>
-            <a:off x="762000" y="15525750"/>
-            <a:ext cx="9525" cy="857250"/>
+            <a:off x="762000" y="15478125"/>
+            <a:ext cx="9525" cy="904875"/>
           </a:xfrm>
           <a:prstGeom prst="rect">
             <a:avLst/>
@@ -3580,8 +3580,8 @@
         </p:nvSpPr>
         <p:spPr>
           <a:xfrm>
-            <a:off x="9515475" y="15525750"/>
-            <a:ext cx="9525" cy="857250"/>
+            <a:off x="9515475" y="15478125"/>
+            <a:ext cx="9525" cy="904875"/>
           </a:xfrm>
           <a:prstGeom prst="rect">
             <a:avLst/>
@@ -3624,7 +3624,7 @@
         </p:nvSpPr>
         <p:spPr>
           <a:xfrm>
-            <a:off x="1081566" y="15907229"/>
+            <a:off x="1081566" y="15883417"/>
             <a:ext cx="94293" cy="94292"/>
           </a:xfrm>
           <a:prstGeom prst="rect">
@@ -3668,8 +3668,8 @@
         </p:nvSpPr>
         <p:spPr>
           <a:xfrm>
-            <a:off x="873175" y="914400"/>
-            <a:ext cx="756523" cy="152400"/>
+            <a:off x="851148" y="900112"/>
+            <a:ext cx="827008" cy="180975"/>
           </a:xfrm>
           <a:prstGeom prst="rect">
             <a:avLst/>
@@ -3686,7 +3686,7 @@
               </a:lnSpc>
             </a:pPr>
             <a:r>
-              <a:rPr sz="1200" i="0" b="1" spc="24">
+              <a:rPr sz="1425" i="0" b="1" spc="28">
                 <a:solidFill>
                   <a:srgbClr val="14161A"/>
                 </a:solidFill>
@@ -3707,8 +3707,8 @@
         </p:nvSpPr>
         <p:spPr>
           <a:xfrm>
-            <a:off x="7276654" y="900112"/>
-            <a:ext cx="3978354" cy="180975"/>
+            <a:off x="6855023" y="885825"/>
+            <a:ext cx="4652962" cy="209550"/>
           </a:xfrm>
           <a:prstGeom prst="rect">
             <a:avLst/>
@@ -3721,7 +3721,7 @@
           <a:p>
             <a:pPr algn="l"/>
             <a:r>
-              <a:rPr sz="1200" i="0" b="0" spc="384">
+              <a:rPr sz="1425" i="0" b="0" spc="456">
                 <a:solidFill>
                   <a:srgbClr val="8A8F99"/>
                 </a:solidFill>
@@ -3743,7 +3743,7 @@
         <p:spPr>
           <a:xfrm>
             <a:off x="-2057400" y="6934200"/>
-            <a:ext cx="14401800" cy="228600"/>
+            <a:ext cx="14401800" cy="238125"/>
           </a:xfrm>
           <a:prstGeom prst="rect">
             <a:avLst/>
@@ -3756,7 +3756,7 @@
           <a:p>
             <a:pPr algn="ctr"/>
             <a:r>
-              <a:rPr sz="1575" i="0" b="0" spc="472">
+              <a:rPr sz="1650" i="0" b="0" spc="462">
                 <a:solidFill>
                   <a:srgbClr val="2D5BE3"/>
                 </a:solidFill>
@@ -3777,7 +3777,7 @@
         </p:nvSpPr>
         <p:spPr>
           <a:xfrm>
-            <a:off x="-2057400" y="7315200"/>
+            <a:off x="-2057400" y="7324725"/>
             <a:ext cx="14401800" cy="683419"/>
           </a:xfrm>
           <a:prstGeom prst="rect">
@@ -3816,8 +3816,8 @@
         </p:nvSpPr>
         <p:spPr>
           <a:xfrm>
-            <a:off x="-2057400" y="8131969"/>
-            <a:ext cx="14401800" cy="180975"/>
+            <a:off x="-2057400" y="8141494"/>
+            <a:ext cx="14401800" cy="209550"/>
           </a:xfrm>
           <a:prstGeom prst="rect">
             <a:avLst/>
@@ -3830,7 +3830,7 @@
           <a:p>
             <a:pPr algn="ctr"/>
             <a:r>
-              <a:rPr sz="1200" i="0" b="0" spc="384">
+              <a:rPr sz="1425" i="0" b="0" spc="456">
                 <a:solidFill>
                   <a:srgbClr val="8A8F99"/>
                 </a:solidFill>
@@ -3851,8 +3851,8 @@
         </p:nvSpPr>
         <p:spPr>
           <a:xfrm>
-            <a:off x="762000" y="9055894"/>
-            <a:ext cx="1025366" cy="398115"/>
+            <a:off x="762000" y="9113044"/>
+            <a:ext cx="1059180" cy="419100"/>
           </a:xfrm>
           <a:prstGeom prst="rect">
             <a:avLst/>
@@ -3869,7 +3869,7 @@
               </a:lnSpc>
             </a:pPr>
             <a:r>
-              <a:rPr sz="2850" i="0" b="1">
+              <a:rPr sz="3000" i="0" b="1">
                 <a:solidFill>
                   <a:srgbClr val="2D5BE3"/>
                 </a:solidFill>
@@ -3890,8 +3890,8 @@
         </p:nvSpPr>
         <p:spPr>
           <a:xfrm>
-            <a:off x="1336179" y="9055894"/>
-            <a:ext cx="5059918" cy="323850"/>
+            <a:off x="1357312" y="9113044"/>
+            <a:ext cx="4837033" cy="381000"/>
           </a:xfrm>
           <a:prstGeom prst="rect">
             <a:avLst/>
@@ -3904,7 +3904,7 @@
           <a:p>
             <a:pPr algn="l"/>
             <a:r>
-              <a:rPr sz="2250" i="0" b="1">
+              <a:rPr sz="2625" i="0" b="1">
                 <a:solidFill>
                   <a:srgbClr val="14161A"/>
                 </a:solidFill>
@@ -3925,8 +3925,8 @@
         </p:nvSpPr>
         <p:spPr>
           <a:xfrm>
-            <a:off x="1336179" y="9436894"/>
-            <a:ext cx="5059918" cy="289917"/>
+            <a:off x="1357312" y="9551194"/>
+            <a:ext cx="4837033" cy="276225"/>
           </a:xfrm>
           <a:prstGeom prst="rect">
             <a:avLst/>
@@ -3943,7 +3943,7 @@
               </a:lnSpc>
             </a:pPr>
             <a:r>
-              <a:rPr sz="1575" i="0" b="0">
+              <a:rPr sz="1500" i="0" b="0">
                 <a:solidFill>
                   <a:srgbClr val="8A8F99"/>
                 </a:solidFill>
@@ -3964,8 +3964,8 @@
         </p:nvSpPr>
         <p:spPr>
           <a:xfrm>
-            <a:off x="762000" y="10155436"/>
-            <a:ext cx="1025366" cy="398115"/>
+            <a:off x="762000" y="10294144"/>
+            <a:ext cx="1059180" cy="419100"/>
           </a:xfrm>
           <a:prstGeom prst="rect">
             <a:avLst/>
@@ -3982,7 +3982,7 @@
               </a:lnSpc>
             </a:pPr>
             <a:r>
-              <a:rPr sz="2850" i="0" b="1">
+              <a:rPr sz="3000" i="0" b="1">
                 <a:solidFill>
                   <a:srgbClr val="2D5BE3"/>
                 </a:solidFill>
@@ -4003,8 +4003,8 @@
         </p:nvSpPr>
         <p:spPr>
           <a:xfrm>
-            <a:off x="1336179" y="10155436"/>
-            <a:ext cx="4775121" cy="323850"/>
+            <a:off x="1357312" y="10294144"/>
+            <a:ext cx="4565809" cy="381000"/>
           </a:xfrm>
           <a:prstGeom prst="rect">
             <a:avLst/>
@@ -4017,7 +4017,7 @@
           <a:p>
             <a:pPr algn="l"/>
             <a:r>
-              <a:rPr sz="2250" i="0" b="1">
+              <a:rPr sz="2625" i="0" b="1">
                 <a:solidFill>
                   <a:srgbClr val="14161A"/>
                 </a:solidFill>
@@ -4038,8 +4038,8 @@
         </p:nvSpPr>
         <p:spPr>
           <a:xfrm>
-            <a:off x="1336179" y="10536436"/>
-            <a:ext cx="4775121" cy="289917"/>
+            <a:off x="1357312" y="10732294"/>
+            <a:ext cx="4565809" cy="276225"/>
           </a:xfrm>
           <a:prstGeom prst="rect">
             <a:avLst/>
@@ -4056,7 +4056,7 @@
               </a:lnSpc>
             </a:pPr>
             <a:r>
-              <a:rPr sz="1575" i="0" b="0">
+              <a:rPr sz="1500" i="0" b="0">
                 <a:solidFill>
                   <a:srgbClr val="8A8F99"/>
                 </a:solidFill>
@@ -4077,8 +4077,8 @@
         </p:nvSpPr>
         <p:spPr>
           <a:xfrm>
-            <a:off x="762000" y="11254978"/>
-            <a:ext cx="1025366" cy="398115"/>
+            <a:off x="762000" y="11475244"/>
+            <a:ext cx="1059180" cy="419100"/>
           </a:xfrm>
           <a:prstGeom prst="rect">
             <a:avLst/>
@@ -4095,7 +4095,7 @@
               </a:lnSpc>
             </a:pPr>
             <a:r>
-              <a:rPr sz="2850" i="0" b="1">
+              <a:rPr sz="3000" i="0" b="1">
                 <a:solidFill>
                   <a:srgbClr val="2D5BE3"/>
                 </a:solidFill>
@@ -4116,8 +4116,8 @@
         </p:nvSpPr>
         <p:spPr>
           <a:xfrm>
-            <a:off x="1336179" y="11254978"/>
-            <a:ext cx="5113258" cy="323850"/>
+            <a:off x="1357312" y="11475244"/>
+            <a:ext cx="4887992" cy="381000"/>
           </a:xfrm>
           <a:prstGeom prst="rect">
             <a:avLst/>
@@ -4130,7 +4130,7 @@
           <a:p>
             <a:pPr algn="l"/>
             <a:r>
-              <a:rPr sz="2250" i="0" b="1">
+              <a:rPr sz="2625" i="0" b="1">
                 <a:solidFill>
                   <a:srgbClr val="14161A"/>
                 </a:solidFill>
@@ -4151,8 +4151,8 @@
         </p:nvSpPr>
         <p:spPr>
           <a:xfrm>
-            <a:off x="1336179" y="11635978"/>
-            <a:ext cx="5113258" cy="289917"/>
+            <a:off x="1357312" y="11913394"/>
+            <a:ext cx="4887992" cy="276225"/>
           </a:xfrm>
           <a:prstGeom prst="rect">
             <a:avLst/>
@@ -4169,7 +4169,7 @@
               </a:lnSpc>
             </a:pPr>
             <a:r>
-              <a:rPr sz="1575" i="0" b="0">
+              <a:rPr sz="1500" i="0" b="0">
                 <a:solidFill>
                   <a:srgbClr val="8A8F99"/>
                 </a:solidFill>
@@ -4190,8 +4190,8 @@
         </p:nvSpPr>
         <p:spPr>
           <a:xfrm>
-            <a:off x="1314450" y="15825788"/>
-            <a:ext cx="3115151" cy="257175"/>
+            <a:off x="1314450" y="15782925"/>
+            <a:ext cx="3590687" cy="295275"/>
           </a:xfrm>
           <a:prstGeom prst="rect">
             <a:avLst/>
@@ -4204,7 +4204,7 @@
           <a:p>
             <a:pPr algn="l"/>
             <a:r>
-              <a:rPr sz="1725" i="0" b="1" spc="34">
+              <a:rPr sz="2025" i="0" b="1" spc="40">
                 <a:solidFill>
                   <a:srgbClr val="14161A"/>
                 </a:solidFill>
@@ -4225,8 +4225,8 @@
         </p:nvSpPr>
         <p:spPr>
           <a:xfrm>
-            <a:off x="9001125" y="15821025"/>
-            <a:ext cx="685800" cy="266700"/>
+            <a:off x="8972550" y="15773400"/>
+            <a:ext cx="731520" cy="314325"/>
           </a:xfrm>
           <a:prstGeom prst="rect">
             <a:avLst/>
@@ -4239,7 +4239,7 @@
           <a:p>
             <a:pPr algn="l"/>
             <a:r>
-              <a:rPr sz="1800" i="0" b="0">
+              <a:rPr sz="2100" i="0" b="0">
                 <a:solidFill>
                   <a:srgbClr val="2D5BE3"/>
                 </a:solidFill>
@@ -4260,8 +4260,8 @@
         </p:nvSpPr>
         <p:spPr>
           <a:xfrm>
-            <a:off x="1468041" y="17249775"/>
-            <a:ext cx="7350919" cy="180975"/>
+            <a:off x="814626" y="17221200"/>
+            <a:ext cx="8657749" cy="209550"/>
           </a:xfrm>
           <a:prstGeom prst="rect">
             <a:avLst/>
@@ -4274,7 +4274,7 @@
           <a:p>
             <a:pPr algn="ctr"/>
             <a:r>
-              <a:rPr sz="1200" i="0" b="0" spc="384">
+              <a:rPr sz="1425" i="0" b="0" spc="456">
                 <a:solidFill>
                   <a:srgbClr val="8A8F99"/>
                 </a:solidFill>
